--- a/slide_template.pptx
+++ b/slide_template.pptx
@@ -1,110 +1,108 @@
 
 <file path=ppt/presentation.xml><?xml version="1.0" encoding="utf-8"?>
-<p:presentation xmlns:a="http://schemas.openxmlformats.org/drawingml/2006/main" xmlns:r="http://schemas.openxmlformats.org/officeDocument/2006/relationships" xmlns:p="http://schemas.openxmlformats.org/presentationml/2006/main" saveSubsetFonts="1" autoCompressPictures="0">
-  <p:sldMasterIdLst>
-    <p:sldMasterId id="2147483648" r:id="rId1"/>
-  </p:sldMasterIdLst>
-  <p:sldIdLst>
-    <p:sldId id="256" r:id="rId7"/>
-  </p:sldIdLst>
-  <p:sldSz cx="12191695" cy="6858000" type="screen4x3"/>
-  <p:notesSz cx="6858000" cy="9144000"/>
-  <p:defaultTextStyle>
-    <a:defPPr>
-      <a:defRPr lang="en-US"/>
-    </a:defPPr>
-    <a:lvl1pPr marL="0" algn="l" defTabSz="457200" rtl="0" eaLnBrk="1" latinLnBrk="0" hangingPunct="1">
-      <a:defRPr sz="1800" kern="1200">
-        <a:solidFill>
-          <a:schemeClr val="tx1"/>
-        </a:solidFill>
-        <a:latin typeface="+mn-lt"/>
-        <a:ea typeface="+mn-ea"/>
-        <a:cs typeface="+mn-cs"/>
-      </a:defRPr>
-    </a:lvl1pPr>
-    <a:lvl2pPr marL="457200" algn="l" defTabSz="457200" rtl="0" eaLnBrk="1" latinLnBrk="0" hangingPunct="1">
-      <a:defRPr sz="1800" kern="1200">
-        <a:solidFill>
-          <a:schemeClr val="tx1"/>
-        </a:solidFill>
-        <a:latin typeface="+mn-lt"/>
-        <a:ea typeface="+mn-ea"/>
-        <a:cs typeface="+mn-cs"/>
-      </a:defRPr>
-    </a:lvl2pPr>
-    <a:lvl3pPr marL="914400" algn="l" defTabSz="457200" rtl="0" eaLnBrk="1" latinLnBrk="0" hangingPunct="1">
-      <a:defRPr sz="1800" kern="1200">
-        <a:solidFill>
-          <a:schemeClr val="tx1"/>
-        </a:solidFill>
-        <a:latin typeface="+mn-lt"/>
-        <a:ea typeface="+mn-ea"/>
-        <a:cs typeface="+mn-cs"/>
-      </a:defRPr>
-    </a:lvl3pPr>
-    <a:lvl4pPr marL="1371600" algn="l" defTabSz="457200" rtl="0" eaLnBrk="1" latinLnBrk="0" hangingPunct="1">
-      <a:defRPr sz="1800" kern="1200">
-        <a:solidFill>
-          <a:schemeClr val="tx1"/>
-        </a:solidFill>
-        <a:latin typeface="+mn-lt"/>
-        <a:ea typeface="+mn-ea"/>
-        <a:cs typeface="+mn-cs"/>
-      </a:defRPr>
-    </a:lvl4pPr>
-    <a:lvl5pPr marL="1828800" algn="l" defTabSz="457200" rtl="0" eaLnBrk="1" latinLnBrk="0" hangingPunct="1">
-      <a:defRPr sz="1800" kern="1200">
-        <a:solidFill>
-          <a:schemeClr val="tx1"/>
-        </a:solidFill>
-        <a:latin typeface="+mn-lt"/>
-        <a:ea typeface="+mn-ea"/>
-        <a:cs typeface="+mn-cs"/>
-      </a:defRPr>
-    </a:lvl5pPr>
-    <a:lvl6pPr marL="2286000" algn="l" defTabSz="457200" rtl="0" eaLnBrk="1" latinLnBrk="0" hangingPunct="1">
-      <a:defRPr sz="1800" kern="1200">
-        <a:solidFill>
-          <a:schemeClr val="tx1"/>
-        </a:solidFill>
-        <a:latin typeface="+mn-lt"/>
-        <a:ea typeface="+mn-ea"/>
-        <a:cs typeface="+mn-cs"/>
-      </a:defRPr>
-    </a:lvl6pPr>
-    <a:lvl7pPr marL="2743200" algn="l" defTabSz="457200" rtl="0" eaLnBrk="1" latinLnBrk="0" hangingPunct="1">
-      <a:defRPr sz="1800" kern="1200">
-        <a:solidFill>
-          <a:schemeClr val="tx1"/>
-        </a:solidFill>
-        <a:latin typeface="+mn-lt"/>
-        <a:ea typeface="+mn-ea"/>
-        <a:cs typeface="+mn-cs"/>
-      </a:defRPr>
-    </a:lvl7pPr>
-    <a:lvl8pPr marL="3200400" algn="l" defTabSz="457200" rtl="0" eaLnBrk="1" latinLnBrk="0" hangingPunct="1">
-      <a:defRPr sz="1800" kern="1200">
-        <a:solidFill>
-          <a:schemeClr val="tx1"/>
-        </a:solidFill>
-        <a:latin typeface="+mn-lt"/>
-        <a:ea typeface="+mn-ea"/>
-        <a:cs typeface="+mn-cs"/>
-      </a:defRPr>
-    </a:lvl8pPr>
-    <a:lvl9pPr marL="3657600" algn="l" defTabSz="457200" rtl="0" eaLnBrk="1" latinLnBrk="0" hangingPunct="1">
-      <a:defRPr sz="1800" kern="1200">
-        <a:solidFill>
-          <a:schemeClr val="tx1"/>
-        </a:solidFill>
-        <a:latin typeface="+mn-lt"/>
-        <a:ea typeface="+mn-ea"/>
-        <a:cs typeface="+mn-cs"/>
-      </a:defRPr>
-    </a:lvl9pPr>
-  </p:defaultTextStyle>
-</p:presentation>
+<ns0:presentation xmlns:ns0="http://schemas.openxmlformats.org/presentationml/2006/main" xmlns:ns1="http://schemas.openxmlformats.org/officeDocument/2006/relationships" xmlns:ns2="http://schemas.openxmlformats.org/drawingml/2006/main" saveSubsetFonts="1" autoCompressPictures="0">
+  <ns0:sldMasterIdLst>
+    <ns0:sldMasterId id="2147483648" ns1:id="rId1"/>
+  </ns0:sldMasterIdLst>
+  <ns0:sldIdLst/>
+  <ns0:sldSz cx="12191695" cy="6858000" type="screen4x3"/>
+  <ns0:notesSz cx="6858000" cy="9144000"/>
+  <ns0:defaultTextStyle>
+    <ns2:defPPr>
+      <ns2:defRPr lang="en-US"/>
+    </ns2:defPPr>
+    <ns2:lvl1pPr marL="0" algn="l" defTabSz="457200" rtl="0" eaLnBrk="1" latinLnBrk="0" hangingPunct="1">
+      <ns2:defRPr sz="1800" kern="1200">
+        <ns2:solidFill>
+          <ns2:schemeClr val="tx1"/>
+        </ns2:solidFill>
+        <ns2:latin typeface="+mn-lt"/>
+        <ns2:ea typeface="+mn-ea"/>
+        <ns2:cs typeface="+mn-cs"/>
+      </ns2:defRPr>
+    </ns2:lvl1pPr>
+    <ns2:lvl2pPr marL="457200" algn="l" defTabSz="457200" rtl="0" eaLnBrk="1" latinLnBrk="0" hangingPunct="1">
+      <ns2:defRPr sz="1800" kern="1200">
+        <ns2:solidFill>
+          <ns2:schemeClr val="tx1"/>
+        </ns2:solidFill>
+        <ns2:latin typeface="+mn-lt"/>
+        <ns2:ea typeface="+mn-ea"/>
+        <ns2:cs typeface="+mn-cs"/>
+      </ns2:defRPr>
+    </ns2:lvl2pPr>
+    <ns2:lvl3pPr marL="914400" algn="l" defTabSz="457200" rtl="0" eaLnBrk="1" latinLnBrk="0" hangingPunct="1">
+      <ns2:defRPr sz="1800" kern="1200">
+        <ns2:solidFill>
+          <ns2:schemeClr val="tx1"/>
+        </ns2:solidFill>
+        <ns2:latin typeface="+mn-lt"/>
+        <ns2:ea typeface="+mn-ea"/>
+        <ns2:cs typeface="+mn-cs"/>
+      </ns2:defRPr>
+    </ns2:lvl3pPr>
+    <ns2:lvl4pPr marL="1371600" algn="l" defTabSz="457200" rtl="0" eaLnBrk="1" latinLnBrk="0" hangingPunct="1">
+      <ns2:defRPr sz="1800" kern="1200">
+        <ns2:solidFill>
+          <ns2:schemeClr val="tx1"/>
+        </ns2:solidFill>
+        <ns2:latin typeface="+mn-lt"/>
+        <ns2:ea typeface="+mn-ea"/>
+        <ns2:cs typeface="+mn-cs"/>
+      </ns2:defRPr>
+    </ns2:lvl4pPr>
+    <ns2:lvl5pPr marL="1828800" algn="l" defTabSz="457200" rtl="0" eaLnBrk="1" latinLnBrk="0" hangingPunct="1">
+      <ns2:defRPr sz="1800" kern="1200">
+        <ns2:solidFill>
+          <ns2:schemeClr val="tx1"/>
+        </ns2:solidFill>
+        <ns2:latin typeface="+mn-lt"/>
+        <ns2:ea typeface="+mn-ea"/>
+        <ns2:cs typeface="+mn-cs"/>
+      </ns2:defRPr>
+    </ns2:lvl5pPr>
+    <ns2:lvl6pPr marL="2286000" algn="l" defTabSz="457200" rtl="0" eaLnBrk="1" latinLnBrk="0" hangingPunct="1">
+      <ns2:defRPr sz="1800" kern="1200">
+        <ns2:solidFill>
+          <ns2:schemeClr val="tx1"/>
+        </ns2:solidFill>
+        <ns2:latin typeface="+mn-lt"/>
+        <ns2:ea typeface="+mn-ea"/>
+        <ns2:cs typeface="+mn-cs"/>
+      </ns2:defRPr>
+    </ns2:lvl6pPr>
+    <ns2:lvl7pPr marL="2743200" algn="l" defTabSz="457200" rtl="0" eaLnBrk="1" latinLnBrk="0" hangingPunct="1">
+      <ns2:defRPr sz="1800" kern="1200">
+        <ns2:solidFill>
+          <ns2:schemeClr val="tx1"/>
+        </ns2:solidFill>
+        <ns2:latin typeface="+mn-lt"/>
+        <ns2:ea typeface="+mn-ea"/>
+        <ns2:cs typeface="+mn-cs"/>
+      </ns2:defRPr>
+    </ns2:lvl7pPr>
+    <ns2:lvl8pPr marL="3200400" algn="l" defTabSz="457200" rtl="0" eaLnBrk="1" latinLnBrk="0" hangingPunct="1">
+      <ns2:defRPr sz="1800" kern="1200">
+        <ns2:solidFill>
+          <ns2:schemeClr val="tx1"/>
+        </ns2:solidFill>
+        <ns2:latin typeface="+mn-lt"/>
+        <ns2:ea typeface="+mn-ea"/>
+        <ns2:cs typeface="+mn-cs"/>
+      </ns2:defRPr>
+    </ns2:lvl8pPr>
+    <ns2:lvl9pPr marL="3657600" algn="l" defTabSz="457200" rtl="0" eaLnBrk="1" latinLnBrk="0" hangingPunct="1">
+      <ns2:defRPr sz="1800" kern="1200">
+        <ns2:solidFill>
+          <ns2:schemeClr val="tx1"/>
+        </ns2:solidFill>
+        <ns2:latin typeface="+mn-lt"/>
+        <ns2:ea typeface="+mn-ea"/>
+        <ns2:cs typeface="+mn-cs"/>
+      </ns2:defRPr>
+    </ns2:lvl9pPr>
+  </ns0:defaultTextStyle>
+</ns0:presentation>
 </file>
 
 <file path=ppt/slideLayouts/slideLayout1.xml><?xml version="1.0" encoding="utf-8"?>
@@ -3076,24 +3074,6 @@
     </p:otherStyle>
   </p:txStyles>
 </p:sldMaster>
-</file>
-
-<file path=ppt/slides/slide1.xml><?xml version="1.0" encoding="utf-8"?>
-<p:sld xmlns:a="http://schemas.openxmlformats.org/drawingml/2006/main" xmlns:p="http://schemas.openxmlformats.org/presentationml/2006/main" xmlns:r="http://schemas.openxmlformats.org/officeDocument/2006/relationships">
-  <p:cSld>
-    <p:spTree>
-      <p:nvGrpSpPr>
-        <p:cNvPr id="1" name=""/>
-        <p:cNvGrpSpPr/>
-        <p:nvPr/>
-      </p:nvGrpSpPr>
-      <p:grpSpPr/>
-    </p:spTree>
-  </p:cSld>
-  <p:clrMapOvr>
-    <a:masterClrMapping/>
-  </p:clrMapOvr>
-</p:sld>
 </file>
 
 <file path=ppt/theme/theme1.xml><?xml version="1.0" encoding="utf-8"?>
